--- a/Diabetes_Readmission_Presentation.pptx
+++ b/Diabetes_Readmission_Presentation.pptx
@@ -16131,7 +16131,7 @@
         <p:spPr>
           <a:xfrm>
             <a:off x="640080" y="987552"/>
-            <a:ext cx="2286000" cy="384048"/>
+            <a:ext cx="2115319" cy="384048"/>
           </a:xfrm>
           <a:prstGeom prst="rect">
             <a:avLst/>
@@ -16155,8 +16155,8 @@
         </p:nvSpPr>
         <p:spPr>
           <a:xfrm>
-            <a:off x="2944368" y="1042416"/>
-            <a:ext cx="411480" cy="256032"/>
+            <a:off x="2843047" y="1042416"/>
+            <a:ext cx="512801" cy="256032"/>
           </a:xfrm>
           <a:prstGeom prst="rect">
             <a:avLst/>
@@ -16219,8 +16219,8 @@
         </p:nvSpPr>
         <p:spPr>
           <a:xfrm>
-            <a:off x="2944368" y="1499616"/>
-            <a:ext cx="411480" cy="256032"/>
+            <a:off x="2426993" y="1499616"/>
+            <a:ext cx="928855" cy="256032"/>
           </a:xfrm>
           <a:prstGeom prst="rect">
             <a:avLst/>
@@ -16407,8 +16407,8 @@
         </p:nvSpPr>
         <p:spPr>
           <a:xfrm>
-            <a:off x="365760" y="955548"/>
-            <a:ext cx="8503920" cy="310896"/>
+            <a:off x="3520440" y="947811"/>
+            <a:ext cx="5257800" cy="310896"/>
           </a:xfrm>
           <a:prstGeom prst="rect">
             <a:avLst/>
@@ -16432,7 +16432,7 @@
         </p:nvSpPr>
         <p:spPr>
           <a:xfrm>
-            <a:off x="417576" y="996696"/>
+            <a:off x="3568511" y="896112"/>
             <a:ext cx="2157984" cy="256032"/>
           </a:xfrm>
           <a:prstGeom prst="rect">
@@ -16471,7 +16471,7 @@
         </p:nvSpPr>
         <p:spPr>
           <a:xfrm>
-            <a:off x="2514600" y="996696"/>
+            <a:off x="4934055" y="947811"/>
             <a:ext cx="1517904" cy="256032"/>
           </a:xfrm>
           <a:prstGeom prst="rect">
@@ -16510,7 +16510,7 @@
         </p:nvSpPr>
         <p:spPr>
           <a:xfrm>
-            <a:off x="4069080" y="996696"/>
+            <a:off x="6145554" y="975243"/>
             <a:ext cx="1335024" cy="256032"/>
           </a:xfrm>
           <a:prstGeom prst="rect">
@@ -16549,7 +16549,7 @@
         </p:nvSpPr>
         <p:spPr>
           <a:xfrm>
-            <a:off x="5573268" y="1010412"/>
+            <a:off x="7545406" y="1007247"/>
             <a:ext cx="832104" cy="256032"/>
           </a:xfrm>
           <a:prstGeom prst="rect">
@@ -16588,8 +16588,8 @@
         </p:nvSpPr>
         <p:spPr>
           <a:xfrm>
-            <a:off x="320040" y="1271016"/>
-            <a:ext cx="8503920" cy="310896"/>
+            <a:off x="3520440" y="1271016"/>
+            <a:ext cx="5303520" cy="310896"/>
           </a:xfrm>
           <a:prstGeom prst="rect">
             <a:avLst/>
@@ -16613,7 +16613,7 @@
         </p:nvSpPr>
         <p:spPr>
           <a:xfrm>
-            <a:off x="368808" y="1307592"/>
+            <a:off x="3519743" y="1207008"/>
             <a:ext cx="1917192" cy="256032"/>
           </a:xfrm>
           <a:prstGeom prst="rect">
@@ -16652,7 +16652,7 @@
         </p:nvSpPr>
         <p:spPr>
           <a:xfrm>
-            <a:off x="2514600" y="1307592"/>
+            <a:off x="4934055" y="1258707"/>
             <a:ext cx="1517904" cy="256032"/>
           </a:xfrm>
           <a:prstGeom prst="rect">
@@ -16691,7 +16691,7 @@
         </p:nvSpPr>
         <p:spPr>
           <a:xfrm>
-            <a:off x="4069080" y="1307592"/>
+            <a:off x="6145554" y="1286139"/>
             <a:ext cx="1335024" cy="256032"/>
           </a:xfrm>
           <a:prstGeom prst="rect">
@@ -16730,7 +16730,7 @@
         </p:nvSpPr>
         <p:spPr>
           <a:xfrm>
-            <a:off x="5440680" y="1307592"/>
+            <a:off x="7412818" y="1304427"/>
             <a:ext cx="832104" cy="256032"/>
           </a:xfrm>
           <a:prstGeom prst="rect">
@@ -16769,7 +16769,7 @@
         </p:nvSpPr>
         <p:spPr>
           <a:xfrm>
-            <a:off x="7040880" y="1307592"/>
+            <a:off x="8260784" y="1297745"/>
             <a:ext cx="822960" cy="201168"/>
           </a:xfrm>
           <a:prstGeom prst="rect">
@@ -16808,8 +16808,8 @@
         </p:nvSpPr>
         <p:spPr>
           <a:xfrm>
-            <a:off x="320040" y="1545336"/>
-            <a:ext cx="8503920" cy="310896"/>
+            <a:off x="3520440" y="1552370"/>
+            <a:ext cx="5401056" cy="310896"/>
           </a:xfrm>
           <a:prstGeom prst="rect">
             <a:avLst/>
@@ -16833,7 +16833,7 @@
         </p:nvSpPr>
         <p:spPr>
           <a:xfrm>
-            <a:off x="368808" y="1591056"/>
+            <a:off x="3541079" y="1490472"/>
             <a:ext cx="1965960" cy="246888"/>
           </a:xfrm>
           <a:prstGeom prst="rect">
@@ -16872,7 +16872,7 @@
         </p:nvSpPr>
         <p:spPr>
           <a:xfrm>
-            <a:off x="2514600" y="1581912"/>
+            <a:off x="4934055" y="1533027"/>
             <a:ext cx="1517904" cy="256032"/>
           </a:xfrm>
           <a:prstGeom prst="rect">
@@ -16911,7 +16911,7 @@
         </p:nvSpPr>
         <p:spPr>
           <a:xfrm>
-            <a:off x="4069080" y="1581912"/>
+            <a:off x="6145554" y="1560459"/>
             <a:ext cx="1335024" cy="256032"/>
           </a:xfrm>
           <a:prstGeom prst="rect">
@@ -16950,7 +16950,7 @@
         </p:nvSpPr>
         <p:spPr>
           <a:xfrm>
-            <a:off x="5440680" y="1581912"/>
+            <a:off x="7412818" y="1578747"/>
             <a:ext cx="832104" cy="256032"/>
           </a:xfrm>
           <a:prstGeom prst="rect">
@@ -16989,7 +16989,7 @@
         </p:nvSpPr>
         <p:spPr>
           <a:xfrm>
-            <a:off x="7040880" y="1581912"/>
+            <a:off x="8260784" y="1572065"/>
             <a:ext cx="822960" cy="201168"/>
           </a:xfrm>
           <a:prstGeom prst="rect">
@@ -17028,8 +17028,8 @@
         </p:nvSpPr>
         <p:spPr>
           <a:xfrm>
-            <a:off x="320040" y="1819656"/>
-            <a:ext cx="8503920" cy="310896"/>
+            <a:off x="3517392" y="1819656"/>
+            <a:ext cx="5306568" cy="310896"/>
           </a:xfrm>
           <a:prstGeom prst="rect">
             <a:avLst/>
@@ -17053,7 +17053,7 @@
         </p:nvSpPr>
         <p:spPr>
           <a:xfrm>
-            <a:off x="356616" y="1865376"/>
+            <a:off x="3528887" y="1764792"/>
             <a:ext cx="2157984" cy="256032"/>
           </a:xfrm>
           <a:prstGeom prst="rect">
@@ -17092,7 +17092,7 @@
         </p:nvSpPr>
         <p:spPr>
           <a:xfrm>
-            <a:off x="2514600" y="1856232"/>
+            <a:off x="4934055" y="1807347"/>
             <a:ext cx="1517904" cy="256032"/>
           </a:xfrm>
           <a:prstGeom prst="rect">
@@ -17131,7 +17131,7 @@
         </p:nvSpPr>
         <p:spPr>
           <a:xfrm>
-            <a:off x="4069080" y="1856232"/>
+            <a:off x="6166268" y="1834779"/>
             <a:ext cx="1335024" cy="256032"/>
           </a:xfrm>
           <a:prstGeom prst="rect">
@@ -17170,7 +17170,7 @@
         </p:nvSpPr>
         <p:spPr>
           <a:xfrm>
-            <a:off x="5440680" y="1856232"/>
+            <a:off x="7412818" y="1853067"/>
             <a:ext cx="832104" cy="256032"/>
           </a:xfrm>
           <a:prstGeom prst="rect">
@@ -17209,7 +17209,7 @@
         </p:nvSpPr>
         <p:spPr>
           <a:xfrm>
-            <a:off x="7040880" y="1856232"/>
+            <a:off x="8260784" y="1846385"/>
             <a:ext cx="822960" cy="201168"/>
           </a:xfrm>
           <a:prstGeom prst="rect">
@@ -17248,8 +17248,8 @@
         </p:nvSpPr>
         <p:spPr>
           <a:xfrm>
-            <a:off x="320040" y="2093976"/>
-            <a:ext cx="8503920" cy="310896"/>
+            <a:off x="3492774" y="2093976"/>
+            <a:ext cx="5306568" cy="310896"/>
           </a:xfrm>
           <a:prstGeom prst="rect">
             <a:avLst/>
@@ -17273,7 +17273,7 @@
         </p:nvSpPr>
         <p:spPr>
           <a:xfrm>
-            <a:off x="352044" y="2130552"/>
+            <a:off x="3524315" y="2029968"/>
             <a:ext cx="2157984" cy="256032"/>
           </a:xfrm>
           <a:prstGeom prst="rect">
@@ -17312,7 +17312,7 @@
         </p:nvSpPr>
         <p:spPr>
           <a:xfrm>
-            <a:off x="2514600" y="2130552"/>
+            <a:off x="4934055" y="2081667"/>
             <a:ext cx="1517904" cy="256032"/>
           </a:xfrm>
           <a:prstGeom prst="rect">
@@ -17351,7 +17351,7 @@
         </p:nvSpPr>
         <p:spPr>
           <a:xfrm>
-            <a:off x="4069080" y="2130552"/>
+            <a:off x="6166268" y="2109099"/>
             <a:ext cx="1335024" cy="256032"/>
           </a:xfrm>
           <a:prstGeom prst="rect">
@@ -17390,7 +17390,7 @@
         </p:nvSpPr>
         <p:spPr>
           <a:xfrm>
-            <a:off x="5440680" y="2130552"/>
+            <a:off x="7412818" y="2127387"/>
             <a:ext cx="832104" cy="256032"/>
           </a:xfrm>
           <a:prstGeom prst="rect">
@@ -17429,7 +17429,7 @@
         </p:nvSpPr>
         <p:spPr>
           <a:xfrm>
-            <a:off x="7040880" y="2130552"/>
+            <a:off x="8260784" y="2120705"/>
             <a:ext cx="822960" cy="201168"/>
           </a:xfrm>
           <a:prstGeom prst="rect">
@@ -17468,8 +17468,8 @@
         </p:nvSpPr>
         <p:spPr>
           <a:xfrm>
-            <a:off x="320040" y="2368296"/>
-            <a:ext cx="8503920" cy="310896"/>
+            <a:off x="3492774" y="2368296"/>
+            <a:ext cx="5331186" cy="310896"/>
           </a:xfrm>
           <a:prstGeom prst="rect">
             <a:avLst/>
@@ -17493,7 +17493,7 @@
         </p:nvSpPr>
         <p:spPr>
           <a:xfrm>
-            <a:off x="349758" y="2404872"/>
+            <a:off x="3522029" y="2304288"/>
             <a:ext cx="2157984" cy="256032"/>
           </a:xfrm>
           <a:prstGeom prst="rect">
@@ -17532,7 +17532,7 @@
         </p:nvSpPr>
         <p:spPr>
           <a:xfrm>
-            <a:off x="2514600" y="2404872"/>
+            <a:off x="4934055" y="2355987"/>
             <a:ext cx="1517904" cy="256032"/>
           </a:xfrm>
           <a:prstGeom prst="rect">
@@ -17571,7 +17571,7 @@
         </p:nvSpPr>
         <p:spPr>
           <a:xfrm>
-            <a:off x="4069080" y="2404872"/>
+            <a:off x="6166268" y="2383419"/>
             <a:ext cx="1335024" cy="256032"/>
           </a:xfrm>
           <a:prstGeom prst="rect">
@@ -17610,7 +17610,7 @@
         </p:nvSpPr>
         <p:spPr>
           <a:xfrm>
-            <a:off x="5440680" y="2404872"/>
+            <a:off x="7412818" y="2401707"/>
             <a:ext cx="832104" cy="256032"/>
           </a:xfrm>
           <a:prstGeom prst="rect">
@@ -17649,7 +17649,7 @@
         </p:nvSpPr>
         <p:spPr>
           <a:xfrm>
-            <a:off x="7040880" y="2404872"/>
+            <a:off x="8269928" y="2395025"/>
             <a:ext cx="822960" cy="201168"/>
           </a:xfrm>
           <a:prstGeom prst="rect">
@@ -17688,8 +17688,8 @@
         </p:nvSpPr>
         <p:spPr>
           <a:xfrm>
-            <a:off x="320040" y="2642616"/>
-            <a:ext cx="8503920" cy="310896"/>
+            <a:off x="3492774" y="2642616"/>
+            <a:ext cx="5331186" cy="310896"/>
           </a:xfrm>
           <a:prstGeom prst="rect">
             <a:avLst/>
@@ -17713,7 +17713,7 @@
         </p:nvSpPr>
         <p:spPr>
           <a:xfrm>
-            <a:off x="338328" y="2676906"/>
+            <a:off x="3510599" y="2576322"/>
             <a:ext cx="2157984" cy="256032"/>
           </a:xfrm>
           <a:prstGeom prst="rect">
@@ -17752,7 +17752,7 @@
         </p:nvSpPr>
         <p:spPr>
           <a:xfrm>
-            <a:off x="2514600" y="2679192"/>
+            <a:off x="4934055" y="2630307"/>
             <a:ext cx="1517904" cy="256032"/>
           </a:xfrm>
           <a:prstGeom prst="rect">
@@ -17791,7 +17791,7 @@
         </p:nvSpPr>
         <p:spPr>
           <a:xfrm>
-            <a:off x="4069080" y="2679192"/>
+            <a:off x="6166268" y="2657739"/>
             <a:ext cx="1335024" cy="256032"/>
           </a:xfrm>
           <a:prstGeom prst="rect">
@@ -17830,7 +17830,7 @@
         </p:nvSpPr>
         <p:spPr>
           <a:xfrm>
-            <a:off x="5440680" y="2679192"/>
+            <a:off x="7412818" y="2676027"/>
             <a:ext cx="832104" cy="256032"/>
           </a:xfrm>
           <a:prstGeom prst="rect">
@@ -17869,7 +17869,7 @@
         </p:nvSpPr>
         <p:spPr>
           <a:xfrm>
-            <a:off x="7040880" y="2679192"/>
+            <a:off x="8269928" y="2669345"/>
             <a:ext cx="822960" cy="201168"/>
           </a:xfrm>
           <a:prstGeom prst="rect">
